--- a/content/docs/theory-analysis/envoy-configuration-istio/images/images.pptx
+++ b/content/docs/theory-analysis/envoy-configuration-istio/images/images.pptx
@@ -221,7 +221,7 @@
           <a:p>
             <a:fld id="{6CD5550B-26C4-49A9-A5BA-636EF7BE6CE9}" type="datetimeFigureOut">
               <a:rPr lang="ko-KR" altLang="en-US" smtClean="0"/>
-              <a:t>2026. 8. 18.</a:t>
+              <a:t>2026. 8. 31.</a:t>
             </a:fld>
             <a:endParaRPr lang="ko-KR" altLang="en-US"/>
           </a:p>
@@ -667,7 +667,7 @@
           <a:p>
             <a:fld id="{FB30EDBD-1C2D-4C1E-B459-B60219FAB484}" type="datetimeFigureOut">
               <a:rPr lang="ko-KR" altLang="en-US" smtClean="0"/>
-              <a:t>2026. 8. 18.</a:t>
+              <a:t>2026. 8. 31.</a:t>
             </a:fld>
             <a:endParaRPr lang="ko-KR" altLang="en-US"/>
           </a:p>
@@ -830,7 +830,7 @@
           <a:p>
             <a:fld id="{FB30EDBD-1C2D-4C1E-B459-B60219FAB484}" type="datetimeFigureOut">
               <a:rPr lang="ko-KR" altLang="en-US" smtClean="0"/>
-              <a:t>2026. 8. 18.</a:t>
+              <a:t>2026. 8. 31.</a:t>
             </a:fld>
             <a:endParaRPr lang="ko-KR" altLang="en-US"/>
           </a:p>
@@ -1003,7 +1003,7 @@
           <a:p>
             <a:fld id="{FB30EDBD-1C2D-4C1E-B459-B60219FAB484}" type="datetimeFigureOut">
               <a:rPr lang="ko-KR" altLang="en-US" smtClean="0"/>
-              <a:t>2026. 8. 18.</a:t>
+              <a:t>2026. 8. 31.</a:t>
             </a:fld>
             <a:endParaRPr lang="ko-KR" altLang="en-US"/>
           </a:p>
@@ -1166,7 +1166,7 @@
           <a:p>
             <a:fld id="{FB30EDBD-1C2D-4C1E-B459-B60219FAB484}" type="datetimeFigureOut">
               <a:rPr lang="ko-KR" altLang="en-US" smtClean="0"/>
-              <a:t>2026. 8. 18.</a:t>
+              <a:t>2026. 8. 31.</a:t>
             </a:fld>
             <a:endParaRPr lang="ko-KR" altLang="en-US"/>
           </a:p>
@@ -1406,7 +1406,7 @@
           <a:p>
             <a:fld id="{FB30EDBD-1C2D-4C1E-B459-B60219FAB484}" type="datetimeFigureOut">
               <a:rPr lang="ko-KR" altLang="en-US" smtClean="0"/>
-              <a:t>2026. 8. 18.</a:t>
+              <a:t>2026. 8. 31.</a:t>
             </a:fld>
             <a:endParaRPr lang="ko-KR" altLang="en-US"/>
           </a:p>
@@ -1686,7 +1686,7 @@
           <a:p>
             <a:fld id="{FB30EDBD-1C2D-4C1E-B459-B60219FAB484}" type="datetimeFigureOut">
               <a:rPr lang="ko-KR" altLang="en-US" smtClean="0"/>
-              <a:t>2026. 8. 18.</a:t>
+              <a:t>2026. 8. 31.</a:t>
             </a:fld>
             <a:endParaRPr lang="ko-KR" altLang="en-US"/>
           </a:p>
@@ -2100,7 +2100,7 @@
           <a:p>
             <a:fld id="{FB30EDBD-1C2D-4C1E-B459-B60219FAB484}" type="datetimeFigureOut">
               <a:rPr lang="ko-KR" altLang="en-US" smtClean="0"/>
-              <a:t>2026. 8. 18.</a:t>
+              <a:t>2026. 8. 31.</a:t>
             </a:fld>
             <a:endParaRPr lang="ko-KR" altLang="en-US"/>
           </a:p>
@@ -2212,7 +2212,7 @@
           <a:p>
             <a:fld id="{FB30EDBD-1C2D-4C1E-B459-B60219FAB484}" type="datetimeFigureOut">
               <a:rPr lang="ko-KR" altLang="en-US" smtClean="0"/>
-              <a:t>2026. 8. 18.</a:t>
+              <a:t>2026. 8. 31.</a:t>
             </a:fld>
             <a:endParaRPr lang="ko-KR" altLang="en-US"/>
           </a:p>
@@ -2302,7 +2302,7 @@
           <a:p>
             <a:fld id="{FB30EDBD-1C2D-4C1E-B459-B60219FAB484}" type="datetimeFigureOut">
               <a:rPr lang="ko-KR" altLang="en-US" smtClean="0"/>
-              <a:t>2026. 8. 18.</a:t>
+              <a:t>2026. 8. 31.</a:t>
             </a:fld>
             <a:endParaRPr lang="ko-KR" altLang="en-US"/>
           </a:p>
@@ -2572,7 +2572,7 @@
           <a:p>
             <a:fld id="{FB30EDBD-1C2D-4C1E-B459-B60219FAB484}" type="datetimeFigureOut">
               <a:rPr lang="ko-KR" altLang="en-US" smtClean="0"/>
-              <a:t>2026. 8. 18.</a:t>
+              <a:t>2026. 8. 31.</a:t>
             </a:fld>
             <a:endParaRPr lang="ko-KR" altLang="en-US"/>
           </a:p>
@@ -2819,7 +2819,7 @@
           <a:p>
             <a:fld id="{FB30EDBD-1C2D-4C1E-B459-B60219FAB484}" type="datetimeFigureOut">
               <a:rPr lang="ko-KR" altLang="en-US" smtClean="0"/>
-              <a:t>2026. 8. 18.</a:t>
+              <a:t>2026. 8. 31.</a:t>
             </a:fld>
             <a:endParaRPr lang="ko-KR" altLang="en-US"/>
           </a:p>
@@ -3025,7 +3025,7 @@
           <a:p>
             <a:fld id="{FB30EDBD-1C2D-4C1E-B459-B60219FAB484}" type="datetimeFigureOut">
               <a:rPr lang="ko-KR" altLang="en-US" smtClean="0"/>
-              <a:t>2026. 8. 18.</a:t>
+              <a:t>2026. 8. 31.</a:t>
             </a:fld>
             <a:endParaRPr lang="ko-KR" altLang="en-US"/>
           </a:p>
@@ -3525,7 +3525,7 @@
                   <a:schemeClr val="tx1"/>
                 </a:solidFill>
               </a:rPr>
-              <a:t>server-b</a:t>
+              <a:t>server-b :8080</a:t>
             </a:r>
           </a:p>
           <a:p>
@@ -3536,7 +3536,7 @@
                   <a:schemeClr val="tx1"/>
                 </a:solidFill>
               </a:rPr>
-              <a:t>Pod</a:t>
+              <a:t>Service</a:t>
             </a:r>
           </a:p>
         </p:txBody>
@@ -3595,7 +3595,7 @@
                   <a:schemeClr val="tx1"/>
                 </a:solidFill>
               </a:rPr>
-              <a:t>server-b</a:t>
+              <a:t>server-b :8080</a:t>
             </a:r>
           </a:p>
           <a:p>
@@ -3606,7 +3606,7 @@
                   <a:schemeClr val="tx1"/>
                 </a:solidFill>
               </a:rPr>
-              <a:t>Service</a:t>
+              <a:t>Pod</a:t>
             </a:r>
           </a:p>
         </p:txBody>
@@ -3759,7 +3759,7 @@
                   <a:schemeClr val="tx1"/>
                 </a:solidFill>
               </a:rPr>
-              <a:t>server-a</a:t>
+              <a:t>server-a :8080</a:t>
             </a:r>
           </a:p>
           <a:p>
@@ -3770,8 +3770,13 @@
                   <a:schemeClr val="tx1"/>
                 </a:solidFill>
               </a:rPr>
-              <a:t>Pod</a:t>
-            </a:r>
+              <a:t>Service</a:t>
+            </a:r>
+            <a:endParaRPr kumimoji="1" lang="en-US" altLang="ko-KR" sz="1000" b="1">
+              <a:solidFill>
+                <a:schemeClr val="tx1"/>
+              </a:solidFill>
+            </a:endParaRPr>
           </a:p>
         </p:txBody>
       </p:sp>
@@ -3829,7 +3834,7 @@
                   <a:schemeClr val="tx1"/>
                 </a:solidFill>
               </a:rPr>
-              <a:t>server-a</a:t>
+              <a:t>server-a :8080</a:t>
             </a:r>
           </a:p>
           <a:p>
@@ -3840,7 +3845,7 @@
                   <a:schemeClr val="tx1"/>
                 </a:solidFill>
               </a:rPr>
-              <a:t>Service</a:t>
+              <a:t>Pod</a:t>
             </a:r>
           </a:p>
         </p:txBody>
@@ -3899,7 +3904,7 @@
                   <a:schemeClr val="tx1"/>
                 </a:solidFill>
               </a:rPr>
-              <a:t>server-c</a:t>
+              <a:t>server-c :9090</a:t>
             </a:r>
           </a:p>
           <a:p>
@@ -3910,7 +3915,7 @@
                   <a:schemeClr val="tx1"/>
                 </a:solidFill>
               </a:rPr>
-              <a:t>Pod</a:t>
+              <a:t>Service</a:t>
             </a:r>
           </a:p>
         </p:txBody>
@@ -3969,7 +3974,7 @@
                   <a:schemeClr val="tx1"/>
                 </a:solidFill>
               </a:rPr>
-              <a:t>server-c</a:t>
+              <a:t>server-c :9090</a:t>
             </a:r>
           </a:p>
           <a:p>
@@ -3980,7 +3985,7 @@
                   <a:schemeClr val="tx1"/>
                 </a:solidFill>
               </a:rPr>
-              <a:t>Service</a:t>
+              <a:t>Pod</a:t>
             </a:r>
           </a:p>
         </p:txBody>
@@ -8339,7 +8344,7 @@
                   <a:schemeClr val="tx1"/>
                 </a:solidFill>
               </a:rPr>
-              <a:t>istio.metadata_exchange (shared)</a:t>
+              <a:t>istio.metadata_exchange</a:t>
             </a:r>
           </a:p>
         </p:txBody>
